--- a/tools/rcn-schema-sunburst-intro.pptx
+++ b/tools/rcn-schema-sunburst-intro.pptx
@@ -3723,7 +3723,7 @@
                 </a:solidFill>
                 <a:latin typeface="Calibri"/>
               </a:rPr>
-              <a:t>Each label is capped by the room its own wedge has. What does not fit is shortened; what cannot fit at all becomes a faint ellipsis — and every segment carries its full text, its source list and its ring name, on hover. Click to pin it, because a touch screen has no hover.</a:t>
+              <a:t>Each label is capped by the room its own wedge has. What does not fit is shortened; what cannot fit at all becomes a faint ellipsis — and every segment carries its full text, its source list and its ring name, on hover. Click to pin it, because a touch screen has no hover. Search dims rather than filters, so proportions never shift underfoot, and a colour toggle swaps the family reading for OPM Object / Process.</a:t>
             </a:r>
           </a:p>
         </p:txBody>
@@ -25681,8 +25681,8 @@
         </p:nvSpPr>
         <p:spPr>
           <a:xfrm>
-            <a:off x="502920" y="4526280"/>
-            <a:ext cx="11155680" cy="1463040"/>
+            <a:off x="502920" y="4389120"/>
+            <a:ext cx="11155680" cy="1828800"/>
           </a:xfrm>
           <a:prstGeom prst="rect">
             <a:avLst/>
@@ -25697,11 +25697,11 @@
           <a:p>
             <a:pPr algn="l">
               <a:spcAft>
-                <a:spcPts val="800"/>
+                <a:spcPts val="500"/>
               </a:spcAft>
             </a:pPr>
             <a:r>
-              <a:rPr sz="1900" b="1">
+              <a:rPr sz="1800" b="1">
                 <a:solidFill>
                   <a:srgbClr val="0F172A"/>
                 </a:solidFill>
@@ -25713,33 +25713,49 @@
           <a:p>
             <a:pPr algn="l">
               <a:spcAft>
-                <a:spcPts val="800"/>
+                <a:spcPts val="500"/>
               </a:spcAft>
             </a:pPr>
             <a:r>
-              <a:rPr sz="1700" b="0">
+              <a:rPr sz="1500" b="0">
                 <a:solidFill>
                   <a:srgbClr val="475569"/>
                 </a:solidFill>
                 <a:latin typeface="Calibri"/>
               </a:rPr>
-              <a:t>If edges are ever added, the geometry will accept them and the picture will lie.</a:t>
+              <a:t>Add edges to THIS wheel and the geometry will accept them while the picture lies.</a:t>
             </a:r>
           </a:p>
           <a:p>
             <a:pPr algn="l">
               <a:spcAft>
-                <a:spcPts val="800"/>
+                <a:spcPts val="500"/>
               </a:spcAft>
             </a:pPr>
             <a:r>
-              <a:rPr sz="1700" b="0">
+              <a:rPr sz="1500" b="0">
                 <a:solidFill>
                   <a:srgbClr val="475569"/>
                 </a:solidFill>
                 <a:latin typeface="Calibri"/>
               </a:rPr>
-              <a:t>The causal reading stays in /projection/causal and the Graph Tool, where a loop is drawable and means something.</a:t>
+              <a:t>But a different wheel could carry causality: root it on one concept, put its causes in ring 1, theirs in ring 2. That is a tree — and the same concept appearing twice is the accepted price, exactly as it already is in the Graph Tool's driver trees.</a:t>
+            </a:r>
+          </a:p>
+          <a:p>
+            <a:pPr algn="l">
+              <a:spcAft>
+                <a:spcPts val="500"/>
+              </a:spcAft>
+            </a:pPr>
+            <a:r>
+              <a:rPr sz="1500" b="0">
+                <a:solidFill>
+                  <a:srgbClr val="0F172A"/>
+                </a:solidFill>
+                <a:latin typeface="Calibri"/>
+              </a:rPr>
+              <a:t>The rule is not “a sunburst cannot show influence.” It is that the rings must be the hierarchy you are actually claiming.</a:t>
             </a:r>
           </a:p>
         </p:txBody>

--- a/tools/rcn-schema-sunburst-intro.pptx
+++ b/tools/rcn-schema-sunburst-intro.pptx
@@ -12324,7 +12324,7 @@
           </a:fontRef>
         </p:style>
         <p:txBody>
-          <a:bodyPr rtlCol="0" anchor="ctr" wrap="square"/>
+          <a:bodyPr rtlCol="0" anchor="ctr" wrap="square" lIns="0" rIns="0" tIns="0" bIns="0"/>
           <a:lstStyle/>
           <a:p>
             <a:pPr algn="ctr"/>
@@ -18827,18 +18827,18 @@
           </a:fontRef>
         </p:style>
         <p:txBody>
-          <a:bodyPr rtlCol="0" anchor="ctr" wrap="square"/>
+          <a:bodyPr rtlCol="0" anchor="ctr" wrap="square" lIns="0" rIns="0" tIns="0" bIns="0"/>
           <a:lstStyle/>
           <a:p>
             <a:pPr algn="ctr"/>
             <a:r>
-              <a:rPr sz="1100" b="1">
+              <a:rPr sz="800" b="1">
                 <a:solidFill>
                   <a:srgbClr val="1A1A1A"/>
                 </a:solidFill>
                 <a:latin typeface="Calibri"/>
               </a:rPr>
-              <a:t>by source</a:t>
+              <a:t>sources</a:t>
             </a:r>
           </a:p>
         </p:txBody>
@@ -24591,12 +24591,12 @@
           </a:fontRef>
         </p:style>
         <p:txBody>
-          <a:bodyPr rtlCol="0" anchor="ctr" wrap="square"/>
+          <a:bodyPr rtlCol="0" anchor="ctr" wrap="square" lIns="0" rIns="0" tIns="0" bIns="0"/>
           <a:lstStyle/>
           <a:p>
             <a:pPr algn="ctr"/>
             <a:r>
-              <a:rPr sz="1100" b="1">
+              <a:rPr sz="800" b="1">
                 <a:solidFill>
                   <a:srgbClr val="1A1A1A"/>
                 </a:solidFill>
@@ -25347,11 +25347,11 @@
             <a:avLst/>
           </a:prstGeom>
           <a:solidFill>
-            <a:srgbClr val="FFFBEB"/>
+            <a:srgbClr val="DCFCE7"/>
           </a:solidFill>
           <a:ln w="19050">
             <a:solidFill>
-              <a:srgbClr val="92400E"/>
+              <a:srgbClr val="166534"/>
             </a:solidFill>
           </a:ln>
         </p:spPr>
@@ -25377,11 +25377,11 @@
             <a:r>
               <a:rPr sz="1500" b="1">
                 <a:solidFill>
-                  <a:srgbClr val="92400E"/>
+                  <a:srgbClr val="166534"/>
                 </a:solidFill>
                 <a:latin typeface="Calibri"/>
               </a:rPr>
-              <a:t>There is exactly one example today — and it is being lost.</a:t>
+              <a:t>There is exactly one example so far — and it was being lost.</a:t>
             </a:r>
           </a:p>
           <a:p>
@@ -25393,7 +25393,7 @@
                 </a:solidFill>
                 <a:latin typeface="Calibri"/>
               </a:rPr>
-              <a:t>affect.json draws BOTH “Positive AFFECT” and “Negative AFFECT” as the concept Affect. Because the substrate merges on schema label, only one survives into the database. The wheel shows one wedge where the file has two.</a:t>
+              <a:t>affect.json draws BOTH “Positive AFFECT” and “Negative AFFECT” as the concept Affect. The substrate merged on schema label, so only one ever reached the database and the wheel showed one wedge where the file had two. A state is now a node, and both survive.</a:t>
             </a:r>
           </a:p>
         </p:txBody>
@@ -25428,7 +25428,7 @@
                 </a:solidFill>
                 <a:latin typeface="Calibri"/>
               </a:rPr>
-              <a:t>The shape was ready for this before the data was. That is the useful direction for a schema to be wrong in.</a:t>
+              <a:t>The shape was ready for this before the data was — which is the useful direction for a schema to be wrong in.</a:t>
             </a:r>
           </a:p>
         </p:txBody>
